--- a/docs/presentations/v3/aside-git-branching.pptx
+++ b/docs/presentations/v3/aside-git-branching.pptx
@@ -1856,7 +1856,7 @@
       </p:grpSpPr>
       <p:pic>
         <p:nvPicPr>
-          <p:cNvPr id="2" name="Image 0" descr="/home/user/BasicRobotLessons/docs/presentations/v3/template/assets/logo/team5010-logo.png">    </p:cNvPr>
+          <p:cNvPr id="2" name="Image 0" descr="/home/user/BasicRobotLessons/docs/presentations/v3/template/assets/logo/team5010-logo-onnavy.png">    </p:cNvPr>
           <p:cNvPicPr>
             <a:picLocks noChangeAspect="1"/>
           </p:cNvPicPr>
@@ -2597,7 +2597,7 @@
       </p:sp>
       <p:pic>
         <p:nvPicPr>
-          <p:cNvPr id="16" name="Image 1" descr="/home/user/BasicRobotLessons/docs/presentations/v3/template/assets/logo/team5010-logo.png">    </p:cNvPr>
+          <p:cNvPr id="16" name="Image 1" descr="/home/user/BasicRobotLessons/docs/presentations/v3/template/assets/logo/team5010-logo-onwhite.png">    </p:cNvPr>
           <p:cNvPicPr>
             <a:picLocks noChangeAspect="1"/>
           </p:cNvPicPr>
@@ -3460,7 +3460,7 @@
             <a:r>
               <a:rPr lang="en-US" sz="2000" spc="100" kern="0" dirty="0">
                 <a:solidFill>
-                  <a:srgbClr val="5B6B84"/>
+                  <a:srgbClr val="7A93B8"/>
                 </a:solidFill>
                 <a:latin typeface="Calibri" pitchFamily="34" charset="0"/>
                 <a:ea typeface="Calibri" pitchFamily="34" charset="-122"/>
@@ -3499,7 +3499,7 @@
             <a:r>
               <a:rPr lang="en-US" sz="2000" dirty="0">
                 <a:solidFill>
-                  <a:srgbClr val="5B6B84"/>
+                  <a:srgbClr val="7A93B8"/>
                 </a:solidFill>
                 <a:latin typeface="Calibri" pitchFamily="34" charset="0"/>
                 <a:ea typeface="Calibri" pitchFamily="34" charset="-122"/>
@@ -3513,7 +3513,7 @@
       </p:sp>
       <p:pic>
         <p:nvPicPr>
-          <p:cNvPr id="28" name="Image 1" descr="/home/user/BasicRobotLessons/docs/presentations/v3/template/assets/logo/team5010-logo.png">    </p:cNvPr>
+          <p:cNvPr id="28" name="Image 1" descr="/home/user/BasicRobotLessons/docs/presentations/v3/template/assets/logo/team5010-logo-onnavy.png">    </p:cNvPr>
           <p:cNvPicPr>
             <a:picLocks noChangeAspect="1"/>
           </p:cNvPicPr>
@@ -4130,7 +4130,7 @@
       </p:sp>
       <p:pic>
         <p:nvPicPr>
-          <p:cNvPr id="17" name="Image 2" descr="/home/user/BasicRobotLessons/docs/presentations/v3/template/assets/logo/team5010-logo.png">    </p:cNvPr>
+          <p:cNvPr id="17" name="Image 2" descr="/home/user/BasicRobotLessons/docs/presentations/v3/template/assets/logo/team5010-logo-onwhite.png">    </p:cNvPr>
           <p:cNvPicPr>
             <a:picLocks noChangeAspect="1"/>
           </p:cNvPicPr>
@@ -4655,7 +4655,7 @@
       </p:sp>
       <p:pic>
         <p:nvPicPr>
-          <p:cNvPr id="12" name="Image 1" descr="/home/user/BasicRobotLessons/docs/presentations/v3/template/assets/logo/team5010-logo.png">    </p:cNvPr>
+          <p:cNvPr id="12" name="Image 1" descr="/home/user/BasicRobotLessons/docs/presentations/v3/template/assets/logo/team5010-logo-onwhite.png">    </p:cNvPr>
           <p:cNvPicPr>
             <a:picLocks noChangeAspect="1"/>
           </p:cNvPicPr>
@@ -5162,7 +5162,7 @@
       </p:sp>
       <p:pic>
         <p:nvPicPr>
-          <p:cNvPr id="15" name="Image 1" descr="/home/user/BasicRobotLessons/docs/presentations/v3/template/assets/logo/team5010-logo.png">    </p:cNvPr>
+          <p:cNvPr id="15" name="Image 1" descr="/home/user/BasicRobotLessons/docs/presentations/v3/template/assets/logo/team5010-logo-onwhite.png">    </p:cNvPr>
           <p:cNvPicPr>
             <a:picLocks noChangeAspect="1"/>
           </p:cNvPicPr>
@@ -5795,7 +5795,7 @@
       </p:sp>
       <p:pic>
         <p:nvPicPr>
-          <p:cNvPr id="16" name="Image 1" descr="/home/user/BasicRobotLessons/docs/presentations/v3/template/assets/logo/team5010-logo.png">    </p:cNvPr>
+          <p:cNvPr id="16" name="Image 1" descr="/home/user/BasicRobotLessons/docs/presentations/v3/template/assets/logo/team5010-logo-onwhite.png">    </p:cNvPr>
           <p:cNvPicPr>
             <a:picLocks noChangeAspect="1"/>
           </p:cNvPicPr>
@@ -6366,7 +6366,7 @@
       </p:sp>
       <p:pic>
         <p:nvPicPr>
-          <p:cNvPr id="15" name="Image 1" descr="/home/user/BasicRobotLessons/docs/presentations/v3/template/assets/logo/team5010-logo.png">    </p:cNvPr>
+          <p:cNvPr id="15" name="Image 1" descr="/home/user/BasicRobotLessons/docs/presentations/v3/template/assets/logo/team5010-logo-onwhite.png">    </p:cNvPr>
           <p:cNvPicPr>
             <a:picLocks noChangeAspect="1"/>
           </p:cNvPicPr>
@@ -6919,7 +6919,7 @@
       </p:sp>
       <p:pic>
         <p:nvPicPr>
-          <p:cNvPr id="16" name="Image 1" descr="/home/user/BasicRobotLessons/docs/presentations/v3/template/assets/logo/team5010-logo.png">    </p:cNvPr>
+          <p:cNvPr id="16" name="Image 1" descr="/home/user/BasicRobotLessons/docs/presentations/v3/template/assets/logo/team5010-logo-onwhite.png">    </p:cNvPr>
           <p:cNvPicPr>
             <a:picLocks noChangeAspect="1"/>
           </p:cNvPicPr>
@@ -7550,7 +7550,7 @@
       </p:sp>
       <p:pic>
         <p:nvPicPr>
-          <p:cNvPr id="15" name="Image 1" descr="/home/user/BasicRobotLessons/docs/presentations/v3/template/assets/logo/team5010-logo.png">    </p:cNvPr>
+          <p:cNvPr id="15" name="Image 1" descr="/home/user/BasicRobotLessons/docs/presentations/v3/template/assets/logo/team5010-logo-onwhite.png">    </p:cNvPr>
           <p:cNvPicPr>
             <a:picLocks noChangeAspect="1"/>
           </p:cNvPicPr>
@@ -8163,7 +8163,7 @@
       </p:sp>
       <p:pic>
         <p:nvPicPr>
-          <p:cNvPr id="17" name="Image 1" descr="/home/user/BasicRobotLessons/docs/presentations/v3/template/assets/logo/team5010-logo.png">    </p:cNvPr>
+          <p:cNvPr id="17" name="Image 1" descr="/home/user/BasicRobotLessons/docs/presentations/v3/template/assets/logo/team5010-logo-onwhite.png">    </p:cNvPr>
           <p:cNvPicPr>
             <a:picLocks noChangeAspect="1"/>
           </p:cNvPicPr>
@@ -8786,7 +8786,7 @@
             <a:r>
               <a:rPr lang="en-US" sz="2000" spc="100" kern="0" dirty="0">
                 <a:solidFill>
-                  <a:srgbClr val="5B6B84"/>
+                  <a:srgbClr val="7A93B8"/>
                 </a:solidFill>
                 <a:latin typeface="Calibri" pitchFamily="34" charset="0"/>
                 <a:ea typeface="Calibri" pitchFamily="34" charset="-122"/>
@@ -8825,7 +8825,7 @@
             <a:r>
               <a:rPr lang="en-US" sz="2000" dirty="0">
                 <a:solidFill>
-                  <a:srgbClr val="5B6B84"/>
+                  <a:srgbClr val="7A93B8"/>
                 </a:solidFill>
                 <a:latin typeface="Calibri" pitchFamily="34" charset="0"/>
                 <a:ea typeface="Calibri" pitchFamily="34" charset="-122"/>
@@ -8839,7 +8839,7 @@
       </p:sp>
       <p:pic>
         <p:nvPicPr>
-          <p:cNvPr id="19" name="Image 1" descr="/home/user/BasicRobotLessons/docs/presentations/v3/template/assets/logo/team5010-logo.png">    </p:cNvPr>
+          <p:cNvPr id="19" name="Image 1" descr="/home/user/BasicRobotLessons/docs/presentations/v3/template/assets/logo/team5010-logo-onnavy.png">    </p:cNvPr>
           <p:cNvPicPr>
             <a:picLocks noChangeAspect="1"/>
           </p:cNvPicPr>

--- a/docs/presentations/v3/aside-git-branching.pptx
+++ b/docs/presentations/v3/aside-git-branching.pptx
@@ -2781,12 +2781,12 @@
         </p:nvSpPr>
         <p:spPr>
           <a:xfrm>
-            <a:off x="640080" y="2240280"/>
-            <a:ext cx="5303520" cy="1828800"/>
+            <a:off x="640080" y="1463040"/>
+            <a:ext cx="5303520" cy="2286000"/>
           </a:xfrm>
           <a:prstGeom prst="roundRect">
             <a:avLst>
-              <a:gd name="adj" fmla="val 6000"/>
+              <a:gd name="adj" fmla="val 4800"/>
             </a:avLst>
           </a:prstGeom>
           <a:solidFill>
@@ -2803,8 +2803,8 @@
         </p:nvSpPr>
         <p:spPr>
           <a:xfrm>
-            <a:off x="960120" y="2514600"/>
-            <a:ext cx="502920" cy="502920"/>
+            <a:off x="960120" y="1691640"/>
+            <a:ext cx="457200" cy="457200"/>
           </a:xfrm>
           <a:prstGeom prst="ellipse">
             <a:avLst/>
@@ -2823,8 +2823,8 @@
         </p:nvSpPr>
         <p:spPr>
           <a:xfrm>
-            <a:off x="960120" y="2514600"/>
-            <a:ext cx="502920" cy="502920"/>
+            <a:off x="960120" y="1691640"/>
+            <a:ext cx="457200" cy="457200"/>
           </a:xfrm>
           <a:prstGeom prst="rect">
             <a:avLst/>
@@ -2862,17 +2862,17 @@
         </p:nvSpPr>
         <p:spPr>
           <a:xfrm>
-            <a:off x="960120" y="3200400"/>
-            <a:ext cx="4663440" cy="731520"/>
-          </a:xfrm>
-          <a:prstGeom prst="rect">
-            <a:avLst/>
-          </a:prstGeom>
-          <a:noFill/>
-          <a:ln/>
-        </p:spPr>
-        <p:txBody>
-          <a:bodyPr wrap="square" lIns="0" tIns="0" rIns="0" bIns="0" rtlCol="0" anchor="t"/>
+            <a:off x="1600200" y="1691640"/>
+            <a:ext cx="4023360" cy="457200"/>
+          </a:xfrm>
+          <a:prstGeom prst="rect">
+            <a:avLst/>
+          </a:prstGeom>
+          <a:noFill/>
+          <a:ln/>
+        </p:spPr>
+        <p:txBody>
+          <a:bodyPr wrap="square" lIns="0" tIns="0" rIns="0" bIns="0" rtlCol="0" anchor="ctr"/>
           <a:lstStyle/>
           <a:p>
             <a:pPr indent="0" marL="0">
@@ -2882,7 +2882,7 @@
               <a:buNone/>
             </a:pPr>
             <a:r>
-              <a:rPr lang="en-US" sz="2100" b="1" dirty="0">
+              <a:rPr lang="en-US" sz="2000" b="1" dirty="0">
                 <a:solidFill>
                   <a:srgbClr val="FFFFFF"/>
                 </a:solidFill>
@@ -2892,7 +2892,7 @@
               </a:rPr>
               <a:t>Cause a conflict on purpose</a:t>
             </a:r>
-            <a:endParaRPr lang="en-US" sz="2100" dirty="0"/>
+            <a:endParaRPr lang="en-US" sz="2000" dirty="0"/>
           </a:p>
         </p:txBody>
       </p:sp>
@@ -2904,8 +2904,8 @@
         </p:nvSpPr>
         <p:spPr>
           <a:xfrm>
-            <a:off x="960120" y="3840480"/>
-            <a:ext cx="4663440" cy="137160"/>
+            <a:off x="960120" y="2286000"/>
+            <a:ext cx="4663440" cy="1188720"/>
           </a:xfrm>
           <a:prstGeom prst="rect">
             <a:avLst/>
@@ -2919,12 +2919,12 @@
           <a:p>
             <a:pPr indent="0" marL="0">
               <a:lnSpc>
-                <a:spcPct val="120000"/>
+                <a:spcPct val="125000"/>
               </a:lnSpc>
               <a:buNone/>
             </a:pPr>
             <a:r>
-              <a:rPr lang="en-US" sz="1800" dirty="0">
+              <a:rPr lang="en-US" sz="2000" dirty="0">
                 <a:solidFill>
                   <a:srgbClr val="CADCE8"/>
                 </a:solidFill>
@@ -2932,9 +2932,9 @@
                 <a:ea typeface="Calibri" pitchFamily="34" charset="-122"/>
                 <a:cs typeface="Calibri" pitchFamily="34" charset="-120"/>
               </a:rPr>
-              <a:t>Two branches off main, both changing the same line. Merge the first, then the second — read the markers before resolving.</a:t>
-            </a:r>
-            <a:endParaRPr lang="en-US" sz="1800" dirty="0"/>
+              <a:t>Two branches off main change the same line. Merge the first, then the second — read the markers first.</a:t>
+            </a:r>
+            <a:endParaRPr lang="en-US" sz="2000" dirty="0"/>
           </a:p>
         </p:txBody>
       </p:sp>
@@ -2946,12 +2946,12 @@
         </p:nvSpPr>
         <p:spPr>
           <a:xfrm>
-            <a:off x="6217920" y="2240280"/>
-            <a:ext cx="5303520" cy="1828800"/>
+            <a:off x="6217920" y="1463040"/>
+            <a:ext cx="5303520" cy="2286000"/>
           </a:xfrm>
           <a:prstGeom prst="roundRect">
             <a:avLst>
-              <a:gd name="adj" fmla="val 6000"/>
+              <a:gd name="adj" fmla="val 4800"/>
             </a:avLst>
           </a:prstGeom>
           <a:solidFill>
@@ -2968,8 +2968,8 @@
         </p:nvSpPr>
         <p:spPr>
           <a:xfrm>
-            <a:off x="6537960" y="2514600"/>
-            <a:ext cx="502920" cy="502920"/>
+            <a:off x="6537960" y="1691640"/>
+            <a:ext cx="457200" cy="457200"/>
           </a:xfrm>
           <a:prstGeom prst="ellipse">
             <a:avLst/>
@@ -2988,8 +2988,8 @@
         </p:nvSpPr>
         <p:spPr>
           <a:xfrm>
-            <a:off x="6537960" y="2514600"/>
-            <a:ext cx="502920" cy="502920"/>
+            <a:off x="6537960" y="1691640"/>
+            <a:ext cx="457200" cy="457200"/>
           </a:xfrm>
           <a:prstGeom prst="rect">
             <a:avLst/>
@@ -3027,17 +3027,17 @@
         </p:nvSpPr>
         <p:spPr>
           <a:xfrm>
-            <a:off x="6537960" y="3200400"/>
-            <a:ext cx="4663440" cy="731520"/>
-          </a:xfrm>
-          <a:prstGeom prst="rect">
-            <a:avLst/>
-          </a:prstGeom>
-          <a:noFill/>
-          <a:ln/>
-        </p:spPr>
-        <p:txBody>
-          <a:bodyPr wrap="square" lIns="0" tIns="0" rIns="0" bIns="0" rtlCol="0" anchor="t"/>
+            <a:off x="7178040" y="1691640"/>
+            <a:ext cx="4023360" cy="457200"/>
+          </a:xfrm>
+          <a:prstGeom prst="rect">
+            <a:avLst/>
+          </a:prstGeom>
+          <a:noFill/>
+          <a:ln/>
+        </p:spPr>
+        <p:txBody>
+          <a:bodyPr wrap="square" lIns="0" tIns="0" rIns="0" bIns="0" rtlCol="0" anchor="ctr"/>
           <a:lstStyle/>
           <a:p>
             <a:pPr indent="0" marL="0">
@@ -3047,7 +3047,7 @@
               <a:buNone/>
             </a:pPr>
             <a:r>
-              <a:rPr lang="en-US" sz="2100" b="1" dirty="0">
+              <a:rPr lang="en-US" sz="2000" b="1" dirty="0">
                 <a:solidFill>
                   <a:srgbClr val="FFFFFF"/>
                 </a:solidFill>
@@ -3057,7 +3057,7 @@
               </a:rPr>
               <a:t>Then abort one</a:t>
             </a:r>
-            <a:endParaRPr lang="en-US" sz="2100" dirty="0"/>
+            <a:endParaRPr lang="en-US" sz="2000" dirty="0"/>
           </a:p>
         </p:txBody>
       </p:sp>
@@ -3069,8 +3069,8 @@
         </p:nvSpPr>
         <p:spPr>
           <a:xfrm>
-            <a:off x="6537960" y="3840480"/>
-            <a:ext cx="4663440" cy="137160"/>
+            <a:off x="6537960" y="2286000"/>
+            <a:ext cx="4663440" cy="1188720"/>
           </a:xfrm>
           <a:prstGeom prst="rect">
             <a:avLst/>
@@ -3084,12 +3084,12 @@
           <a:p>
             <a:pPr indent="0" marL="0">
               <a:lnSpc>
-                <a:spcPct val="120000"/>
+                <a:spcPct val="125000"/>
               </a:lnSpc>
               <a:buNone/>
             </a:pPr>
             <a:r>
-              <a:rPr lang="en-US" sz="1800" dirty="0">
+              <a:rPr lang="en-US" sz="2000" dirty="0">
                 <a:solidFill>
                   <a:srgbClr val="CADCE8"/>
                 </a:solidFill>
@@ -3097,9 +3097,9 @@
                 <a:ea typeface="Calibri" pitchFamily="34" charset="-122"/>
                 <a:cs typeface="Calibri" pitchFamily="34" charset="-120"/>
               </a:rPr>
-              <a:t>Do it again, but run git merge --abort at the conflict. Confirm with git status that nothing happened at all.</a:t>
-            </a:r>
-            <a:endParaRPr lang="en-US" sz="1800" dirty="0"/>
+              <a:t>Run git merge --abort at the conflict instead of resolving. Confirm nothing happened.</a:t>
+            </a:r>
+            <a:endParaRPr lang="en-US" sz="2000" dirty="0"/>
           </a:p>
         </p:txBody>
       </p:sp>
@@ -3111,12 +3111,12 @@
         </p:nvSpPr>
         <p:spPr>
           <a:xfrm>
-            <a:off x="640080" y="4343400"/>
-            <a:ext cx="5303520" cy="1828800"/>
+            <a:off x="640080" y="4023360"/>
+            <a:ext cx="5303520" cy="2286000"/>
           </a:xfrm>
           <a:prstGeom prst="roundRect">
             <a:avLst>
-              <a:gd name="adj" fmla="val 6000"/>
+              <a:gd name="adj" fmla="val 4800"/>
             </a:avLst>
           </a:prstGeom>
           <a:solidFill>
@@ -3133,8 +3133,8 @@
         </p:nvSpPr>
         <p:spPr>
           <a:xfrm>
-            <a:off x="960120" y="4617720"/>
-            <a:ext cx="502920" cy="502920"/>
+            <a:off x="960120" y="4251960"/>
+            <a:ext cx="457200" cy="457200"/>
           </a:xfrm>
           <a:prstGeom prst="ellipse">
             <a:avLst/>
@@ -3153,8 +3153,8 @@
         </p:nvSpPr>
         <p:spPr>
           <a:xfrm>
-            <a:off x="960120" y="4617720"/>
-            <a:ext cx="502920" cy="502920"/>
+            <a:off x="960120" y="4251960"/>
+            <a:ext cx="457200" cy="457200"/>
           </a:xfrm>
           <a:prstGeom prst="rect">
             <a:avLst/>
@@ -3192,17 +3192,17 @@
         </p:nvSpPr>
         <p:spPr>
           <a:xfrm>
-            <a:off x="960120" y="5303520"/>
-            <a:ext cx="4663440" cy="731520"/>
-          </a:xfrm>
-          <a:prstGeom prst="rect">
-            <a:avLst/>
-          </a:prstGeom>
-          <a:noFill/>
-          <a:ln/>
-        </p:spPr>
-        <p:txBody>
-          <a:bodyPr wrap="square" lIns="0" tIns="0" rIns="0" bIns="0" rtlCol="0" anchor="t"/>
+            <a:off x="1600200" y="4251960"/>
+            <a:ext cx="4023360" cy="457200"/>
+          </a:xfrm>
+          <a:prstGeom prst="rect">
+            <a:avLst/>
+          </a:prstGeom>
+          <a:noFill/>
+          <a:ln/>
+        </p:spPr>
+        <p:txBody>
+          <a:bodyPr wrap="square" lIns="0" tIns="0" rIns="0" bIns="0" rtlCol="0" anchor="ctr"/>
           <a:lstStyle/>
           <a:p>
             <a:pPr indent="0" marL="0">
@@ -3212,7 +3212,7 @@
               <a:buNone/>
             </a:pPr>
             <a:r>
-              <a:rPr lang="en-US" sz="2100" b="1" dirty="0">
+              <a:rPr lang="en-US" sz="2000" b="1" dirty="0">
                 <a:solidFill>
                   <a:srgbClr val="FFFFFF"/>
                 </a:solidFill>
@@ -3222,7 +3222,7 @@
               </a:rPr>
               <a:t>Rebase the same scenario</a:t>
             </a:r>
-            <a:endParaRPr lang="en-US" sz="2100" dirty="0"/>
+            <a:endParaRPr lang="en-US" sz="2000" dirty="0"/>
           </a:p>
         </p:txBody>
       </p:sp>
@@ -3234,8 +3234,8 @@
         </p:nvSpPr>
         <p:spPr>
           <a:xfrm>
-            <a:off x="960120" y="5943600"/>
-            <a:ext cx="4663440" cy="137160"/>
+            <a:off x="960120" y="4846320"/>
+            <a:ext cx="4663440" cy="1188720"/>
           </a:xfrm>
           <a:prstGeom prst="rect">
             <a:avLst/>
@@ -3249,12 +3249,12 @@
           <a:p>
             <a:pPr indent="0" marL="0">
               <a:lnSpc>
-                <a:spcPct val="120000"/>
+                <a:spcPct val="125000"/>
               </a:lnSpc>
               <a:buNone/>
             </a:pPr>
             <a:r>
-              <a:rPr lang="en-US" sz="1800" dirty="0">
+              <a:rPr lang="en-US" sz="2000" dirty="0">
                 <a:solidFill>
                   <a:srgbClr val="CADCE8"/>
                 </a:solidFill>
@@ -3262,9 +3262,9 @@
                 <a:ea typeface="Calibri" pitchFamily="34" charset="-122"/>
                 <a:cs typeface="Calibri" pitchFamily="34" charset="-120"/>
               </a:rPr>
-              <a:t>Set it up a third time, but rebase instead of merging. Compare the graph — same files, a different story about how they got there.</a:t>
-            </a:r>
-            <a:endParaRPr lang="en-US" sz="1800" dirty="0"/>
+              <a:t>Set it up again, but rebase instead of merging. Compare the graph to what merging gave you.</a:t>
+            </a:r>
+            <a:endParaRPr lang="en-US" sz="2000" dirty="0"/>
           </a:p>
         </p:txBody>
       </p:sp>
@@ -3276,12 +3276,12 @@
         </p:nvSpPr>
         <p:spPr>
           <a:xfrm>
-            <a:off x="6217920" y="4343400"/>
-            <a:ext cx="5303520" cy="1828800"/>
+            <a:off x="6217920" y="4023360"/>
+            <a:ext cx="5303520" cy="2286000"/>
           </a:xfrm>
           <a:prstGeom prst="roundRect">
             <a:avLst>
-              <a:gd name="adj" fmla="val 6000"/>
+              <a:gd name="adj" fmla="val 4800"/>
             </a:avLst>
           </a:prstGeom>
           <a:solidFill>
@@ -3298,8 +3298,8 @@
         </p:nvSpPr>
         <p:spPr>
           <a:xfrm>
-            <a:off x="6537960" y="4617720"/>
-            <a:ext cx="502920" cy="502920"/>
+            <a:off x="6537960" y="4251960"/>
+            <a:ext cx="457200" cy="457200"/>
           </a:xfrm>
           <a:prstGeom prst="ellipse">
             <a:avLst/>
@@ -3318,8 +3318,8 @@
         </p:nvSpPr>
         <p:spPr>
           <a:xfrm>
-            <a:off x="6537960" y="4617720"/>
-            <a:ext cx="502920" cy="502920"/>
+            <a:off x="6537960" y="4251960"/>
+            <a:ext cx="457200" cy="457200"/>
           </a:xfrm>
           <a:prstGeom prst="rect">
             <a:avLst/>
@@ -3357,17 +3357,17 @@
         </p:nvSpPr>
         <p:spPr>
           <a:xfrm>
-            <a:off x="6537960" y="5303520"/>
-            <a:ext cx="4663440" cy="731520"/>
-          </a:xfrm>
-          <a:prstGeom prst="rect">
-            <a:avLst/>
-          </a:prstGeom>
-          <a:noFill/>
-          <a:ln/>
-        </p:spPr>
-        <p:txBody>
-          <a:bodyPr wrap="square" lIns="0" tIns="0" rIns="0" bIns="0" rtlCol="0" anchor="t"/>
+            <a:off x="7178040" y="4251960"/>
+            <a:ext cx="4023360" cy="457200"/>
+          </a:xfrm>
+          <a:prstGeom prst="rect">
+            <a:avLst/>
+          </a:prstGeom>
+          <a:noFill/>
+          <a:ln/>
+        </p:spPr>
+        <p:txBody>
+          <a:bodyPr wrap="square" lIns="0" tIns="0" rIns="0" bIns="0" rtlCol="0" anchor="ctr"/>
           <a:lstStyle/>
           <a:p>
             <a:pPr indent="0" marL="0">
@@ -3377,7 +3377,7 @@
               <a:buNone/>
             </a:pPr>
             <a:r>
-              <a:rPr lang="en-US" sz="2100" b="1" dirty="0">
+              <a:rPr lang="en-US" sz="2000" b="1" dirty="0">
                 <a:solidFill>
                   <a:srgbClr val="FFFFFF"/>
                 </a:solidFill>
@@ -3387,7 +3387,7 @@
               </a:rPr>
               <a:t>Do a real lesson on a branch</a:t>
             </a:r>
-            <a:endParaRPr lang="en-US" sz="2100" dirty="0"/>
+            <a:endParaRPr lang="en-US" sz="2000" dirty="0"/>
           </a:p>
         </p:txBody>
       </p:sp>
@@ -3399,8 +3399,8 @@
         </p:nvSpPr>
         <p:spPr>
           <a:xfrm>
-            <a:off x="6537960" y="5943600"/>
-            <a:ext cx="4663440" cy="137160"/>
+            <a:off x="6537960" y="4846320"/>
+            <a:ext cx="4663440" cy="1188720"/>
           </a:xfrm>
           <a:prstGeom prst="rect">
             <a:avLst/>
@@ -3414,12 +3414,12 @@
           <a:p>
             <a:pPr indent="0" marL="0">
               <a:lnSpc>
-                <a:spcPct val="120000"/>
+                <a:spcPct val="125000"/>
               </a:lnSpc>
               <a:buNone/>
             </a:pPr>
             <a:r>
-              <a:rPr lang="en-US" sz="1800" dirty="0">
+              <a:rPr lang="en-US" sz="2000" dirty="0">
                 <a:solidFill>
                   <a:srgbClr val="CADCE8"/>
                 </a:solidFill>
@@ -3427,9 +3427,9 @@
                 <a:ea typeface="Calibri" pitchFamily="34" charset="-122"/>
                 <a:cs typeface="Calibri" pitchFamily="34" charset="-120"/>
               </a:rPr>
-              <a:t>switch -c, work, commit, switch main, merge, branch -d. Push it and open a pull request against your own repo before merging.</a:t>
-            </a:r>
-            <a:endParaRPr lang="en-US" sz="1800" dirty="0"/>
+              <a:t>switch -c, work, commit, merge, delete the branch. Push it and open a pull request first.</a:t>
+            </a:r>
+            <a:endParaRPr lang="en-US" sz="2000" dirty="0"/>
           </a:p>
         </p:txBody>
       </p:sp>
@@ -3791,8 +3791,8 @@
         </p:nvSpPr>
         <p:spPr>
           <a:xfrm>
-            <a:off x="640080" y="5120640"/>
-            <a:ext cx="6309360" cy="1005840"/>
+            <a:off x="640080" y="5257800"/>
+            <a:ext cx="6309360" cy="1143000"/>
           </a:xfrm>
           <a:prstGeom prst="rect">
             <a:avLst/>
@@ -4417,8 +4417,8 @@
         </p:nvSpPr>
         <p:spPr>
           <a:xfrm>
-            <a:off x="685800" y="3749040"/>
-            <a:ext cx="10241280" cy="2194560"/>
+            <a:off x="685800" y="3703320"/>
+            <a:ext cx="10241280" cy="2514600"/>
           </a:xfrm>
           <a:prstGeom prst="rect">
             <a:avLst/>
@@ -5347,11 +5347,11 @@
         <p:spPr>
           <a:xfrm>
             <a:off x="640080" y="1508760"/>
-            <a:ext cx="10881360" cy="2606040"/>
+            <a:ext cx="10881360" cy="2743200"/>
           </a:xfrm>
           <a:prstGeom prst="roundRect">
             <a:avLst>
-              <a:gd name="adj" fmla="val 4211"/>
+              <a:gd name="adj" fmla="val 4000"/>
             </a:avLst>
           </a:prstGeom>
           <a:solidFill>
@@ -5436,7 +5436,7 @@
         <p:spPr>
           <a:xfrm>
             <a:off x="914400" y="1709928"/>
-            <a:ext cx="10195560" cy="2240280"/>
+            <a:ext cx="10195560" cy="2377440"/>
           </a:xfrm>
           <a:prstGeom prst="rect">
             <a:avLst/>
@@ -5455,7 +5455,7 @@
               <a:buNone/>
             </a:pPr>
             <a:r>
-              <a:rPr lang="en-US" sz="1800" dirty="0">
+              <a:rPr lang="en-US" sz="1400" dirty="0">
                 <a:solidFill>
                   <a:srgbClr val="9EF01A"/>
                 </a:solidFill>
@@ -5465,7 +5465,7 @@
               </a:rPr>
               <a:t>git switch -c lesson-01</a:t>
             </a:r>
-            <a:endParaRPr lang="en-US" sz="1800" dirty="0"/>
+            <a:endParaRPr lang="en-US" sz="1400" dirty="0"/>
           </a:p>
           <a:p>
             <a:pPr indent="0" marL="0">
@@ -5475,7 +5475,7 @@
               <a:buNone/>
             </a:pPr>
             <a:r>
-              <a:rPr lang="en-US" sz="1800" dirty="0">
+              <a:rPr lang="en-US" sz="1400" dirty="0">
                 <a:solidFill>
                   <a:srgbClr val="7FA8C9"/>
                 </a:solidFill>
@@ -5485,7 +5485,7 @@
               </a:rPr>
               <a:t>Switched to a new branch 'lesson-01'</a:t>
             </a:r>
-            <a:endParaRPr lang="en-US" sz="1800" dirty="0"/>
+            <a:endParaRPr lang="en-US" sz="1400" dirty="0"/>
           </a:p>
           <a:p>
             <a:pPr indent="0" marL="0">
@@ -5495,7 +5495,7 @@
               <a:buNone/>
             </a:pPr>
             <a:r>
-              <a:rPr lang="en-US" sz="1800" dirty="0">
+              <a:rPr lang="en-US" sz="1400" dirty="0">
                 <a:solidFill>
                   <a:srgbClr val="7FA8C9"/>
                 </a:solidFill>
@@ -5505,7 +5505,7 @@
               </a:rPr>
               <a:t># do the lesson, commit as you go</a:t>
             </a:r>
-            <a:endParaRPr lang="en-US" sz="1800" dirty="0"/>
+            <a:endParaRPr lang="en-US" sz="1400" dirty="0"/>
           </a:p>
           <a:p>
             <a:pPr indent="0" marL="0">
@@ -5515,7 +5515,7 @@
               <a:buNone/>
             </a:pPr>
             <a:r>
-              <a:rPr lang="en-US" sz="1800" dirty="0">
+              <a:rPr lang="en-US" sz="1400" dirty="0">
                 <a:solidFill>
                   <a:srgbClr val="D7E3F4"/>
                 </a:solidFill>
@@ -5525,7 +5525,7 @@
               </a:rPr>
               <a:t>git add .</a:t>
             </a:r>
-            <a:endParaRPr lang="en-US" sz="1800" dirty="0"/>
+            <a:endParaRPr lang="en-US" sz="1400" dirty="0"/>
           </a:p>
           <a:p>
             <a:pPr indent="0" marL="0">
@@ -5535,7 +5535,7 @@
               <a:buNone/>
             </a:pPr>
             <a:r>
-              <a:rPr lang="en-US" sz="1800" dirty="0">
+              <a:rPr lang="en-US" sz="1400" dirty="0">
                 <a:solidFill>
                   <a:srgbClr val="D7E3F4"/>
                 </a:solidFill>
@@ -5545,7 +5545,7 @@
               </a:rPr>
               <a:t>git commit -m "Lesson 1: spin a motor"</a:t>
             </a:r>
-            <a:endParaRPr lang="en-US" sz="1800" dirty="0"/>
+            <a:endParaRPr lang="en-US" sz="1400" dirty="0"/>
           </a:p>
           <a:p>
             <a:pPr indent="0" marL="0">
@@ -5555,7 +5555,7 @@
               <a:buNone/>
             </a:pPr>
             <a:r>
-              <a:rPr lang="en-US" sz="1800" dirty="0">
+              <a:rPr lang="en-US" sz="1400" dirty="0">
                 <a:solidFill>
                   <a:srgbClr val="9EF01A"/>
                 </a:solidFill>
@@ -5565,7 +5565,7 @@
               </a:rPr>
               <a:t>git branch</a:t>
             </a:r>
-            <a:endParaRPr lang="en-US" sz="1800" dirty="0"/>
+            <a:endParaRPr lang="en-US" sz="1400" dirty="0"/>
           </a:p>
           <a:p>
             <a:pPr indent="0" marL="0">
@@ -5575,7 +5575,7 @@
               <a:buNone/>
             </a:pPr>
             <a:r>
-              <a:rPr lang="en-US" sz="1800" dirty="0">
+              <a:rPr lang="en-US" sz="1400" dirty="0">
                 <a:solidFill>
                   <a:srgbClr val="7FA8C9"/>
                 </a:solidFill>
@@ -5585,7 +5585,7 @@
               </a:rPr>
               <a:t>* lesson-01</a:t>
             </a:r>
-            <a:endParaRPr lang="en-US" sz="1800" dirty="0"/>
+            <a:endParaRPr lang="en-US" sz="1400" dirty="0"/>
           </a:p>
           <a:p>
             <a:pPr indent="0" marL="0">
@@ -5595,7 +5595,7 @@
               <a:buNone/>
             </a:pPr>
             <a:r>
-              <a:rPr lang="en-US" sz="1800" dirty="0">
+              <a:rPr lang="en-US" sz="1400" dirty="0">
                 <a:solidFill>
                   <a:srgbClr val="7FA8C9"/>
                 </a:solidFill>
@@ -5605,7 +5605,7 @@
               </a:rPr>
               <a:t>  main</a:t>
             </a:r>
-            <a:endParaRPr lang="en-US" sz="1800" dirty="0"/>
+            <a:endParaRPr lang="en-US" sz="1400" dirty="0"/>
           </a:p>
         </p:txBody>
       </p:sp>
@@ -5617,12 +5617,12 @@
         </p:nvSpPr>
         <p:spPr>
           <a:xfrm>
-            <a:off x="640080" y="4251960"/>
-            <a:ext cx="10881360" cy="2057400"/>
+            <a:off x="640080" y="4389120"/>
+            <a:ext cx="10881360" cy="1920240"/>
           </a:xfrm>
           <a:prstGeom prst="roundRect">
             <a:avLst>
-              <a:gd name="adj" fmla="val 4444"/>
+              <a:gd name="adj" fmla="val 4762"/>
             </a:avLst>
           </a:prstGeom>
           <a:solidFill>
@@ -5639,7 +5639,7 @@
         </p:nvSpPr>
         <p:spPr>
           <a:xfrm>
-            <a:off x="868680" y="4480560"/>
+            <a:off x="868680" y="4617720"/>
             <a:ext cx="10424160" cy="561975"/>
           </a:xfrm>
           <a:prstGeom prst="rect">
@@ -5681,8 +5681,8 @@
         </p:nvSpPr>
         <p:spPr>
           <a:xfrm>
-            <a:off x="868680" y="5042535"/>
-            <a:ext cx="10424160" cy="1038225"/>
+            <a:off x="868680" y="5179695"/>
+            <a:ext cx="10424160" cy="901065"/>
           </a:xfrm>
           <a:prstGeom prst="rect">
             <a:avLst/>
@@ -5709,7 +5709,7 @@
                 <a:ea typeface="Calibri" pitchFamily="34" charset="-122"/>
                 <a:cs typeface="Calibri" pitchFamily="34" charset="-120"/>
               </a:rPr>
-              <a:t>Nothing about your files changes yet — main and lesson-01 point at the same commit until you make one. Commit as often as you like here; none of it touches main until you say so. The * in git branch's output marks the one you're standing on.</a:t>
+              <a:t>Nothing changes yet — main and lesson-01 point at the same commit until you commit. The * in git branch's output marks the one you're standing on.</a:t>
             </a:r>
             <a:endParaRPr lang="en-US" sz="2000" dirty="0"/>
           </a:p>
@@ -5980,11 +5980,11 @@
         <p:spPr>
           <a:xfrm>
             <a:off x="640080" y="1463040"/>
-            <a:ext cx="10881360" cy="2286000"/>
+            <a:ext cx="10881360" cy="2651760"/>
           </a:xfrm>
           <a:prstGeom prst="roundRect">
             <a:avLst>
-              <a:gd name="adj" fmla="val 4800"/>
+              <a:gd name="adj" fmla="val 4138"/>
             </a:avLst>
           </a:prstGeom>
           <a:solidFill>
@@ -6069,7 +6069,7 @@
         <p:spPr>
           <a:xfrm>
             <a:off x="914400" y="1664208"/>
-            <a:ext cx="10195560" cy="1920240"/>
+            <a:ext cx="10195560" cy="2286000"/>
           </a:xfrm>
           <a:prstGeom prst="rect">
             <a:avLst/>
@@ -6088,7 +6088,7 @@
               <a:buNone/>
             </a:pPr>
             <a:r>
-              <a:rPr lang="en-US" sz="1800" dirty="0">
+              <a:rPr lang="en-US" sz="1500" dirty="0">
                 <a:solidFill>
                   <a:srgbClr val="D7E3F4"/>
                 </a:solidFill>
@@ -6098,7 +6098,7 @@
               </a:rPr>
               <a:t>git switch main</a:t>
             </a:r>
-            <a:endParaRPr lang="en-US" sz="1800" dirty="0"/>
+            <a:endParaRPr lang="en-US" sz="1500" dirty="0"/>
           </a:p>
           <a:p>
             <a:pPr indent="0" marL="0">
@@ -6108,7 +6108,7 @@
               <a:buNone/>
             </a:pPr>
             <a:r>
-              <a:rPr lang="en-US" sz="1800" dirty="0">
+              <a:rPr lang="en-US" sz="1500" dirty="0">
                 <a:solidFill>
                   <a:srgbClr val="9EF01A"/>
                 </a:solidFill>
@@ -6118,7 +6118,7 @@
               </a:rPr>
               <a:t>git merge lesson-01</a:t>
             </a:r>
-            <a:endParaRPr lang="en-US" sz="1800" dirty="0"/>
+            <a:endParaRPr lang="en-US" sz="1500" dirty="0"/>
           </a:p>
           <a:p>
             <a:pPr indent="0" marL="0">
@@ -6128,7 +6128,7 @@
               <a:buNone/>
             </a:pPr>
             <a:r>
-              <a:rPr lang="en-US" sz="1800" dirty="0">
+              <a:rPr lang="en-US" sz="1500" dirty="0">
                 <a:solidFill>
                   <a:srgbClr val="7FA8C9"/>
                 </a:solidFill>
@@ -6138,7 +6138,7 @@
               </a:rPr>
               <a:t>Fast-forward</a:t>
             </a:r>
-            <a:endParaRPr lang="en-US" sz="1800" dirty="0"/>
+            <a:endParaRPr lang="en-US" sz="1500" dirty="0"/>
           </a:p>
           <a:p>
             <a:pPr indent="0" marL="0">
@@ -6148,7 +6148,7 @@
               <a:buNone/>
             </a:pPr>
             <a:r>
-              <a:rPr lang="en-US" sz="1800" dirty="0">
+              <a:rPr lang="en-US" sz="1500" dirty="0">
                 <a:solidFill>
                   <a:srgbClr val="7FA8C9"/>
                 </a:solidFill>
@@ -6158,7 +6158,7 @@
               </a:rPr>
               <a:t> Constants.java | 4 +++-</a:t>
             </a:r>
-            <a:endParaRPr lang="en-US" sz="1800" dirty="0"/>
+            <a:endParaRPr lang="en-US" sz="1500" dirty="0"/>
           </a:p>
           <a:p>
             <a:pPr indent="0" marL="0">
@@ -6168,7 +6168,7 @@
               <a:buNone/>
             </a:pPr>
             <a:r>
-              <a:rPr lang="en-US" sz="1800" dirty="0">
+              <a:rPr lang="en-US" sz="1500" dirty="0">
                 <a:solidFill>
                   <a:srgbClr val="7FA8C9"/>
                 </a:solidFill>
@@ -6178,7 +6178,7 @@
               </a:rPr>
               <a:t> 1 file changed, 3 insertions(+), 1 deletion(-)</a:t>
             </a:r>
-            <a:endParaRPr lang="en-US" sz="1800" dirty="0"/>
+            <a:endParaRPr lang="en-US" sz="1500" dirty="0"/>
           </a:p>
           <a:p>
             <a:pPr indent="0" marL="0">
@@ -6188,7 +6188,7 @@
               <a:buNone/>
             </a:pPr>
             <a:r>
-              <a:rPr lang="en-US" sz="1800" dirty="0">
+              <a:rPr lang="en-US" sz="1500" dirty="0">
                 <a:solidFill>
                   <a:srgbClr val="9EF01A"/>
                 </a:solidFill>
@@ -6198,7 +6198,7 @@
               </a:rPr>
               <a:t>git branch -d lesson-01</a:t>
             </a:r>
-            <a:endParaRPr lang="en-US" sz="1800" dirty="0"/>
+            <a:endParaRPr lang="en-US" sz="1500" dirty="0"/>
           </a:p>
           <a:p>
             <a:pPr indent="0" marL="0">
@@ -6208,7 +6208,7 @@
               <a:buNone/>
             </a:pPr>
             <a:r>
-              <a:rPr lang="en-US" sz="1800" dirty="0">
+              <a:rPr lang="en-US" sz="1500" dirty="0">
                 <a:solidFill>
                   <a:srgbClr val="7FA8C9"/>
                 </a:solidFill>
@@ -6218,7 +6218,7 @@
               </a:rPr>
               <a:t>Deleted branch lesson-01 (was 79bf90a).</a:t>
             </a:r>
-            <a:endParaRPr lang="en-US" sz="1800" dirty="0"/>
+            <a:endParaRPr lang="en-US" sz="1500" dirty="0"/>
           </a:p>
         </p:txBody>
       </p:sp>
@@ -6230,12 +6230,12 @@
         </p:nvSpPr>
         <p:spPr>
           <a:xfrm>
-            <a:off x="640080" y="3931920"/>
-            <a:ext cx="10881360" cy="2103120"/>
+            <a:off x="640080" y="4297680"/>
+            <a:ext cx="10881360" cy="1737360"/>
           </a:xfrm>
           <a:prstGeom prst="roundRect">
             <a:avLst>
-              <a:gd name="adj" fmla="val 4348"/>
+              <a:gd name="adj" fmla="val 5263"/>
             </a:avLst>
           </a:prstGeom>
           <a:solidFill>
@@ -6252,8 +6252,8 @@
         </p:nvSpPr>
         <p:spPr>
           <a:xfrm>
-            <a:off x="914400" y="4206240"/>
-            <a:ext cx="10332720" cy="1554480"/>
+            <a:off x="914400" y="4572000"/>
+            <a:ext cx="10332720" cy="1188720"/>
           </a:xfrm>
           <a:prstGeom prst="rect">
             <a:avLst/>
@@ -6280,7 +6280,7 @@
                 <a:ea typeface="Calibri" pitchFamily="34" charset="-122"/>
                 <a:cs typeface="Calibri" pitchFamily="34" charset="-120"/>
               </a:rPr>
-              <a:t>main hadn't moved, so merging just slides its label up to where lesson-01 already was — no new commit, no thinking required. Deleting the branch afterward only removes the label; Git refuses if the branch's work hasn't actually merged anywhere, so it's a free safety check.</a:t>
+              <a:t>main hadn't moved, so merging slides its label forward — no new commit needed. Deleting the branch only removes the label; Git refuses if it hasn't actually merged, so it's a free safety check.</a:t>
             </a:r>
             <a:endParaRPr lang="en-US" sz="2000" dirty="0"/>
           </a:p>
@@ -6701,7 +6701,7 @@
               <a:buNone/>
             </a:pPr>
             <a:r>
-              <a:rPr lang="en-US" sz="1800" dirty="0">
+              <a:rPr lang="en-US" sz="1500" dirty="0">
                 <a:solidFill>
                   <a:srgbClr val="9EF01A"/>
                 </a:solidFill>
@@ -6711,7 +6711,7 @@
               </a:rPr>
               <a:t>git merge lesson-20</a:t>
             </a:r>
-            <a:endParaRPr lang="en-US" sz="1800" dirty="0"/>
+            <a:endParaRPr lang="en-US" sz="1500" dirty="0"/>
           </a:p>
           <a:p>
             <a:pPr indent="0" marL="0">
@@ -6721,7 +6721,7 @@
               <a:buNone/>
             </a:pPr>
             <a:r>
-              <a:rPr lang="en-US" sz="1800" dirty="0">
+              <a:rPr lang="en-US" sz="1500" dirty="0">
                 <a:solidFill>
                   <a:srgbClr val="7FA8C9"/>
                 </a:solidFill>
@@ -6731,7 +6731,7 @@
               </a:rPr>
               <a:t>Auto-merging Constants.java</a:t>
             </a:r>
-            <a:endParaRPr lang="en-US" sz="1800" dirty="0"/>
+            <a:endParaRPr lang="en-US" sz="1500" dirty="0"/>
           </a:p>
           <a:p>
             <a:pPr indent="0" marL="0">
@@ -6741,7 +6741,7 @@
               <a:buNone/>
             </a:pPr>
             <a:r>
-              <a:rPr lang="en-US" sz="1800" dirty="0">
+              <a:rPr lang="en-US" sz="1500" dirty="0">
                 <a:solidFill>
                   <a:srgbClr val="FF8B8B"/>
                 </a:solidFill>
@@ -6751,7 +6751,7 @@
               </a:rPr>
               <a:t>CONFLICT (content): Merge conflict in Constants.java</a:t>
             </a:r>
-            <a:endParaRPr lang="en-US" sz="1800" dirty="0"/>
+            <a:endParaRPr lang="en-US" sz="1500" dirty="0"/>
           </a:p>
           <a:p>
             <a:pPr indent="0" marL="0">
@@ -6761,7 +6761,7 @@
               <a:buNone/>
             </a:pPr>
             <a:r>
-              <a:rPr lang="en-US" sz="1800" dirty="0">
+              <a:rPr lang="en-US" sz="1500" dirty="0">
                 <a:solidFill>
                   <a:srgbClr val="FF8B8B"/>
                 </a:solidFill>
@@ -6771,7 +6771,7 @@
               </a:rPr>
               <a:t>Automatic merge failed; fix conflicts and then commit the result.</a:t>
             </a:r>
-            <a:endParaRPr lang="en-US" sz="1800" dirty="0"/>
+            <a:endParaRPr lang="en-US" sz="1500" dirty="0"/>
           </a:p>
         </p:txBody>
       </p:sp>
@@ -7212,7 +7212,7 @@
               <a:buNone/>
             </a:pPr>
             <a:r>
-              <a:rPr lang="en-US" sz="1700" dirty="0">
+              <a:rPr lang="en-US" sz="1300" dirty="0">
                 <a:solidFill>
                   <a:srgbClr val="D7E3F4"/>
                 </a:solidFill>
@@ -7222,7 +7222,7 @@
               </a:rPr>
               <a:t>public final class Constants {</a:t>
             </a:r>
-            <a:endParaRPr lang="en-US" sz="1700" dirty="0"/>
+            <a:endParaRPr lang="en-US" sz="1300" dirty="0"/>
           </a:p>
           <a:p>
             <a:pPr indent="0" marL="0">
@@ -7232,7 +7232,7 @@
               <a:buNone/>
             </a:pPr>
             <a:r>
-              <a:rPr lang="en-US" sz="1700" dirty="0">
+              <a:rPr lang="en-US" sz="1300" dirty="0">
                 <a:solidFill>
                   <a:srgbClr val="FF8B8B"/>
                 </a:solidFill>
@@ -7242,7 +7242,7 @@
               </a:rPr>
               <a:t>&lt;&lt;&lt;&lt;&lt;&lt;&lt; HEAD</a:t>
             </a:r>
-            <a:endParaRPr lang="en-US" sz="1700" dirty="0"/>
+            <a:endParaRPr lang="en-US" sz="1300" dirty="0"/>
           </a:p>
           <a:p>
             <a:pPr indent="0" marL="0">
@@ -7252,7 +7252,7 @@
               <a:buNone/>
             </a:pPr>
             <a:r>
-              <a:rPr lang="en-US" sz="1700" dirty="0">
+              <a:rPr lang="en-US" sz="1300" dirty="0">
                 <a:solidFill>
                   <a:srgbClr val="D7E3F4"/>
                 </a:solidFill>
@@ -7262,7 +7262,7 @@
               </a:rPr>
               <a:t>  public static class ElevatorConstants {</a:t>
             </a:r>
-            <a:endParaRPr lang="en-US" sz="1700" dirty="0"/>
+            <a:endParaRPr lang="en-US" sz="1300" dirty="0"/>
           </a:p>
           <a:p>
             <a:pPr indent="0" marL="0">
@@ -7272,7 +7272,7 @@
               <a:buNone/>
             </a:pPr>
             <a:r>
-              <a:rPr lang="en-US" sz="1700" dirty="0">
+              <a:rPr lang="en-US" sz="1300" dirty="0">
                 <a:solidFill>
                   <a:srgbClr val="D7E3F4"/>
                 </a:solidFill>
@@ -7282,7 +7282,7 @@
               </a:rPr>
               <a:t>    public static final double kElevatorKG = 0.18;</a:t>
             </a:r>
-            <a:endParaRPr lang="en-US" sz="1700" dirty="0"/>
+            <a:endParaRPr lang="en-US" sz="1300" dirty="0"/>
           </a:p>
           <a:p>
             <a:pPr indent="0" marL="0">
@@ -7292,7 +7292,7 @@
               <a:buNone/>
             </a:pPr>
             <a:r>
-              <a:rPr lang="en-US" sz="1700" dirty="0">
+              <a:rPr lang="en-US" sz="1300" dirty="0">
                 <a:solidFill>
                   <a:srgbClr val="FF8B8B"/>
                 </a:solidFill>
@@ -7302,7 +7302,7 @@
               </a:rPr>
               <a:t>=======</a:t>
             </a:r>
-            <a:endParaRPr lang="en-US" sz="1700" dirty="0"/>
+            <a:endParaRPr lang="en-US" sz="1300" dirty="0"/>
           </a:p>
           <a:p>
             <a:pPr indent="0" marL="0">
@@ -7312,7 +7312,7 @@
               <a:buNone/>
             </a:pPr>
             <a:r>
-              <a:rPr lang="en-US" sz="1700" dirty="0">
+              <a:rPr lang="en-US" sz="1300" dirty="0">
                 <a:solidFill>
                   <a:srgbClr val="D7E3F4"/>
                 </a:solidFill>
@@ -7322,7 +7322,7 @@
               </a:rPr>
               <a:t>  public static class ArmConstants {</a:t>
             </a:r>
-            <a:endParaRPr lang="en-US" sz="1700" dirty="0"/>
+            <a:endParaRPr lang="en-US" sz="1300" dirty="0"/>
           </a:p>
           <a:p>
             <a:pPr indent="0" marL="0">
@@ -7332,7 +7332,7 @@
               <a:buNone/>
             </a:pPr>
             <a:r>
-              <a:rPr lang="en-US" sz="1700" dirty="0">
+              <a:rPr lang="en-US" sz="1300" dirty="0">
                 <a:solidFill>
                   <a:srgbClr val="D7E3F4"/>
                 </a:solidFill>
@@ -7342,7 +7342,7 @@
               </a:rPr>
               <a:t>    public static final double kArmKG = 0.25;</a:t>
             </a:r>
-            <a:endParaRPr lang="en-US" sz="1700" dirty="0"/>
+            <a:endParaRPr lang="en-US" sz="1300" dirty="0"/>
           </a:p>
           <a:p>
             <a:pPr indent="0" marL="0">
@@ -7352,7 +7352,7 @@
               <a:buNone/>
             </a:pPr>
             <a:r>
-              <a:rPr lang="en-US" sz="1700" dirty="0">
+              <a:rPr lang="en-US" sz="1300" dirty="0">
                 <a:solidFill>
                   <a:srgbClr val="FF8B8B"/>
                 </a:solidFill>
@@ -7362,7 +7362,7 @@
               </a:rPr>
               <a:t>&gt;&gt;&gt;&gt;&gt;&gt;&gt; lesson-20</a:t>
             </a:r>
-            <a:endParaRPr lang="en-US" sz="1700" dirty="0"/>
+            <a:endParaRPr lang="en-US" sz="1300" dirty="0"/>
           </a:p>
           <a:p>
             <a:pPr indent="0" marL="0">
@@ -7372,7 +7372,7 @@
               <a:buNone/>
             </a:pPr>
             <a:r>
-              <a:rPr lang="en-US" sz="1700" dirty="0">
+              <a:rPr lang="en-US" sz="1300" dirty="0">
                 <a:solidFill>
                   <a:srgbClr val="D7E3F4"/>
                 </a:solidFill>
@@ -7382,7 +7382,7 @@
               </a:rPr>
               <a:t>  }</a:t>
             </a:r>
-            <a:endParaRPr lang="en-US" sz="1700" dirty="0"/>
+            <a:endParaRPr lang="en-US" sz="1300" dirty="0"/>
           </a:p>
           <a:p>
             <a:pPr indent="0" marL="0">
@@ -7392,7 +7392,7 @@
               <a:buNone/>
             </a:pPr>
             <a:r>
-              <a:rPr lang="en-US" sz="1700" dirty="0">
+              <a:rPr lang="en-US" sz="1300" dirty="0">
                 <a:solidFill>
                   <a:srgbClr val="D7E3F4"/>
                 </a:solidFill>
@@ -7402,7 +7402,7 @@
               </a:rPr>
               <a:t>}</a:t>
             </a:r>
-            <a:endParaRPr lang="en-US" sz="1700" dirty="0"/>
+            <a:endParaRPr lang="en-US" sz="1300" dirty="0"/>
           </a:p>
         </p:txBody>
       </p:sp>
@@ -7415,11 +7415,11 @@
         <p:spPr>
           <a:xfrm>
             <a:off x="640080" y="4526280"/>
-            <a:ext cx="10881360" cy="1783080"/>
+            <a:ext cx="10881360" cy="1874520"/>
           </a:xfrm>
           <a:prstGeom prst="roundRect">
             <a:avLst>
-              <a:gd name="adj" fmla="val 5128"/>
+              <a:gd name="adj" fmla="val 4878"/>
             </a:avLst>
           </a:prstGeom>
           <a:solidFill>
@@ -7437,7 +7437,7 @@
         <p:spPr>
           <a:xfrm>
             <a:off x="868680" y="4754880"/>
-            <a:ext cx="10424160" cy="1325880"/>
+            <a:ext cx="10424160" cy="1417320"/>
           </a:xfrm>
           <a:prstGeom prst="rect">
             <a:avLst/>
@@ -7464,7 +7464,7 @@
                 <a:ea typeface="Calibri" pitchFamily="34" charset="-122"/>
                 <a:cs typeface="Calibri" pitchFamily="34" charset="-120"/>
               </a:rPr>
-              <a:t>You want the elevator and the arm — both belong in the finished robot. Edit until both blocks are there and the markers are gone, then stage the file and commit. Most conflicts here are two additions landing close together — the fix is keep both, not choose one.</a:t>
+              <a:t>You want the elevator and the arm — both belong in the robot. Edit until both blocks remain and the markers are gone, then stage and commit. Most conflicts here are two additions landing close together — keep both, don't choose.</a:t>
             </a:r>
             <a:endParaRPr lang="en-US" sz="2000" dirty="0"/>
           </a:p>
@@ -7843,7 +7843,7 @@
               <a:buNone/>
             </a:pPr>
             <a:r>
-              <a:rPr lang="en-US" sz="1900" dirty="0">
+              <a:rPr lang="en-US" sz="1600" dirty="0">
                 <a:solidFill>
                   <a:srgbClr val="9EF01A"/>
                 </a:solidFill>
@@ -7853,7 +7853,7 @@
               </a:rPr>
               <a:t>git push -u origin lesson-20</a:t>
             </a:r>
-            <a:endParaRPr lang="en-US" sz="1900" dirty="0"/>
+            <a:endParaRPr lang="en-US" sz="1600" dirty="0"/>
           </a:p>
         </p:txBody>
       </p:sp>
@@ -7866,7 +7866,7 @@
         <p:spPr>
           <a:xfrm>
             <a:off x="640080" y="3017520"/>
-            <a:ext cx="5212080" cy="1005840"/>
+            <a:ext cx="5212080" cy="1188720"/>
           </a:xfrm>
           <a:prstGeom prst="rect">
             <a:avLst/>
@@ -7999,7 +7999,7 @@
                 <a:ea typeface="Calibri" pitchFamily="34" charset="-122"/>
                 <a:cs typeface="Calibri" pitchFamily="34" charset="-120"/>
               </a:rPr>
-              <a:t>Merging the PR merges the branch on GitHub — your laptop doesn't know yet. After it merges:</a:t>
+              <a:t>Merging the PR merges the branch on GitHub — your laptop doesn't know yet.</a:t>
             </a:r>
             <a:endParaRPr lang="en-US" sz="2000" dirty="0"/>
           </a:p>
@@ -8077,7 +8077,7 @@
                 <a:ea typeface="Calibri" pitchFamily="34" charset="-122"/>
                 <a:cs typeface="Calibri" pitchFamily="34" charset="-120"/>
               </a:rPr>
-              <a:t>Now main matches GitHub, and your next branch starts from the real, current state everyone agrees on.</a:t>
+              <a:t>Now main matches GitHub, so your next branch starts from the current, agreed-on state.</a:t>
             </a:r>
             <a:endParaRPr lang="en-US" sz="2000" dirty="0"/>
           </a:p>
@@ -8456,7 +8456,7 @@
               <a:buNone/>
             </a:pPr>
             <a:r>
-              <a:rPr lang="en-US" sz="1600" dirty="0">
+              <a:rPr lang="en-US" sz="1300" dirty="0">
                 <a:solidFill>
                   <a:srgbClr val="D7E3F4"/>
                 </a:solidFill>
@@ -8466,7 +8466,7 @@
               </a:rPr>
               <a:t>git switch lesson-21</a:t>
             </a:r>
-            <a:endParaRPr lang="en-US" sz="1600" dirty="0"/>
+            <a:endParaRPr lang="en-US" sz="1300" dirty="0"/>
           </a:p>
           <a:p>
             <a:pPr indent="0" marL="0">
@@ -8476,7 +8476,7 @@
               <a:buNone/>
             </a:pPr>
             <a:r>
-              <a:rPr lang="en-US" sz="1600" dirty="0">
+              <a:rPr lang="en-US" sz="1300" dirty="0">
                 <a:solidFill>
                   <a:srgbClr val="9EF01A"/>
                 </a:solidFill>
@@ -8486,7 +8486,7 @@
               </a:rPr>
               <a:t>git rebase main</a:t>
             </a:r>
-            <a:endParaRPr lang="en-US" sz="1600" dirty="0"/>
+            <a:endParaRPr lang="en-US" sz="1300" dirty="0"/>
           </a:p>
           <a:p>
             <a:pPr indent="0" marL="0">
@@ -8496,7 +8496,7 @@
               <a:buNone/>
             </a:pPr>
             <a:r>
-              <a:rPr lang="en-US" sz="1600" dirty="0">
+              <a:rPr lang="en-US" sz="1300" dirty="0">
                 <a:solidFill>
                   <a:srgbClr val="7FA8C9"/>
                 </a:solidFill>
@@ -8506,7 +8506,7 @@
               </a:rPr>
               <a:t>Auto-merging Constants.java</a:t>
             </a:r>
-            <a:endParaRPr lang="en-US" sz="1600" dirty="0"/>
+            <a:endParaRPr lang="en-US" sz="1300" dirty="0"/>
           </a:p>
           <a:p>
             <a:pPr indent="0" marL="0">
@@ -8516,7 +8516,7 @@
               <a:buNone/>
             </a:pPr>
             <a:r>
-              <a:rPr lang="en-US" sz="1600" dirty="0">
+              <a:rPr lang="en-US" sz="1300" dirty="0">
                 <a:solidFill>
                   <a:srgbClr val="FF8B8B"/>
                 </a:solidFill>
@@ -8526,7 +8526,7 @@
               </a:rPr>
               <a:t>CONFLICT (content): Merge conflict</a:t>
             </a:r>
-            <a:endParaRPr lang="en-US" sz="1600" dirty="0"/>
+            <a:endParaRPr lang="en-US" sz="1300" dirty="0"/>
           </a:p>
           <a:p>
             <a:pPr indent="0" marL="0">
@@ -8536,7 +8536,7 @@
               <a:buNone/>
             </a:pPr>
             <a:r>
-              <a:rPr lang="en-US" sz="1600" dirty="0">
+              <a:rPr lang="en-US" sz="1300" dirty="0">
                 <a:solidFill>
                   <a:srgbClr val="FF8B8B"/>
                 </a:solidFill>
@@ -8546,7 +8546,7 @@
               </a:rPr>
               <a:t>in Constants.java</a:t>
             </a:r>
-            <a:endParaRPr lang="en-US" sz="1600" dirty="0"/>
+            <a:endParaRPr lang="en-US" sz="1300" dirty="0"/>
           </a:p>
         </p:txBody>
       </p:sp>
@@ -8647,7 +8647,7 @@
                 <a:ea typeface="Calibri" pitchFamily="34" charset="-122"/>
                 <a:cs typeface="Calibri" pitchFamily="34" charset="-120"/>
               </a:rPr>
-              <a:t>HEAD is main here — not you. Rebase already moved you onto main and is replaying your commit as the incoming change. Read the labels, not the positions.</a:t>
+              <a:t>HEAD is main here, not you — rebase already moved you onto main and replays your commit as the incoming side.</a:t>
             </a:r>
             <a:endParaRPr lang="en-US" sz="2000" dirty="0"/>
           </a:p>
@@ -8661,12 +8661,12 @@
         </p:nvSpPr>
         <p:spPr>
           <a:xfrm>
-            <a:off x="640080" y="4114800"/>
-            <a:ext cx="10881360" cy="1965960"/>
+            <a:off x="640080" y="4023360"/>
+            <a:ext cx="10881360" cy="2331720"/>
           </a:xfrm>
           <a:prstGeom prst="roundRect">
             <a:avLst>
-              <a:gd name="adj" fmla="val 5581"/>
+              <a:gd name="adj" fmla="val 4706"/>
             </a:avLst>
           </a:prstGeom>
           <a:solidFill>
@@ -8683,8 +8683,8 @@
         </p:nvSpPr>
         <p:spPr>
           <a:xfrm>
-            <a:off x="914400" y="4297680"/>
-            <a:ext cx="10332720" cy="640080"/>
+            <a:off x="914400" y="4206240"/>
+            <a:ext cx="10332720" cy="822960"/>
           </a:xfrm>
           <a:prstGeom prst="rect">
             <a:avLst/>
@@ -8725,8 +8725,8 @@
         </p:nvSpPr>
         <p:spPr>
           <a:xfrm>
-            <a:off x="914400" y="4983480"/>
-            <a:ext cx="10332720" cy="960120"/>
+            <a:off x="914400" y="5074920"/>
+            <a:ext cx="10332720" cy="1280160"/>
           </a:xfrm>
           <a:prstGeom prst="rect">
             <a:avLst/>

--- a/docs/presentations/v3/aside-git-branching.pptx
+++ b/docs/presentations/v3/aside-git-branching.pptx
@@ -7104,11 +7104,11 @@
         <p:spPr>
           <a:xfrm>
             <a:off x="640080" y="1371600"/>
-            <a:ext cx="10881360" cy="3017520"/>
+            <a:ext cx="10881360" cy="3291840"/>
           </a:xfrm>
           <a:prstGeom prst="roundRect">
             <a:avLst>
-              <a:gd name="adj" fmla="val 3636"/>
+              <a:gd name="adj" fmla="val 3333"/>
             </a:avLst>
           </a:prstGeom>
           <a:solidFill>
@@ -7192,8 +7192,47 @@
         </p:nvSpPr>
         <p:spPr>
           <a:xfrm>
-            <a:off x="914400" y="1572768"/>
-            <a:ext cx="10195560" cy="2651760"/>
+            <a:off x="914400" y="1499616"/>
+            <a:ext cx="10195560" cy="292608"/>
+          </a:xfrm>
+          <a:prstGeom prst="rect">
+            <a:avLst/>
+          </a:prstGeom>
+          <a:noFill/>
+          <a:ln/>
+        </p:spPr>
+        <p:txBody>
+          <a:bodyPr wrap="square" lIns="0" tIns="0" rIns="0" bIns="0" rtlCol="0" anchor="ctr"/>
+          <a:lstStyle/>
+          <a:p>
+            <a:pPr indent="0" marL="0">
+              <a:buNone/>
+            </a:pPr>
+            <a:r>
+              <a:rPr lang="en-US" sz="1500" i="1" dirty="0">
+                <a:solidFill>
+                  <a:srgbClr val="7FA8C9"/>
+                </a:solidFill>
+                <a:latin typeface="Calibri" pitchFamily="34" charset="0"/>
+                <a:ea typeface="Calibri" pitchFamily="34" charset="-122"/>
+                <a:cs typeface="Calibri" pitchFamily="34" charset="-120"/>
+              </a:rPr>
+              <a:t>Open Constants.java — this is what Git wrote into it</a:t>
+            </a:r>
+            <a:endParaRPr lang="en-US" sz="1500" dirty="0"/>
+          </a:p>
+        </p:txBody>
+      </p:sp>
+      <p:sp>
+        <p:nvSpPr>
+          <p:cNvPr id="11" name="Text 8"/>
+          <p:cNvSpPr/>
+          <p:nvPr/>
+        </p:nvSpPr>
+        <p:spPr>
+          <a:xfrm>
+            <a:off x="914400" y="1828800"/>
+            <a:ext cx="10195560" cy="2633472"/>
           </a:xfrm>
           <a:prstGeom prst="rect">
             <a:avLst/>
@@ -7212,7 +7251,7 @@
               <a:buNone/>
             </a:pPr>
             <a:r>
-              <a:rPr lang="en-US" sz="1300" dirty="0">
+              <a:rPr lang="en-US" sz="1200" dirty="0">
                 <a:solidFill>
                   <a:srgbClr val="D7E3F4"/>
                 </a:solidFill>
@@ -7222,7 +7261,7 @@
               </a:rPr>
               <a:t>public final class Constants {</a:t>
             </a:r>
-            <a:endParaRPr lang="en-US" sz="1300" dirty="0"/>
+            <a:endParaRPr lang="en-US" sz="1200" dirty="0"/>
           </a:p>
           <a:p>
             <a:pPr indent="0" marL="0">
@@ -7232,7 +7271,7 @@
               <a:buNone/>
             </a:pPr>
             <a:r>
-              <a:rPr lang="en-US" sz="1300" dirty="0">
+              <a:rPr lang="en-US" sz="1200" dirty="0">
                 <a:solidFill>
                   <a:srgbClr val="FF8B8B"/>
                 </a:solidFill>
@@ -7242,7 +7281,7 @@
               </a:rPr>
               <a:t>&lt;&lt;&lt;&lt;&lt;&lt;&lt; HEAD</a:t>
             </a:r>
-            <a:endParaRPr lang="en-US" sz="1300" dirty="0"/>
+            <a:endParaRPr lang="en-US" sz="1200" dirty="0"/>
           </a:p>
           <a:p>
             <a:pPr indent="0" marL="0">
@@ -7252,7 +7291,7 @@
               <a:buNone/>
             </a:pPr>
             <a:r>
-              <a:rPr lang="en-US" sz="1300" dirty="0">
+              <a:rPr lang="en-US" sz="1200" dirty="0">
                 <a:solidFill>
                   <a:srgbClr val="D7E3F4"/>
                 </a:solidFill>
@@ -7262,7 +7301,7 @@
               </a:rPr>
               <a:t>  public static class ElevatorConstants {</a:t>
             </a:r>
-            <a:endParaRPr lang="en-US" sz="1300" dirty="0"/>
+            <a:endParaRPr lang="en-US" sz="1200" dirty="0"/>
           </a:p>
           <a:p>
             <a:pPr indent="0" marL="0">
@@ -7272,7 +7311,7 @@
               <a:buNone/>
             </a:pPr>
             <a:r>
-              <a:rPr lang="en-US" sz="1300" dirty="0">
+              <a:rPr lang="en-US" sz="1200" dirty="0">
                 <a:solidFill>
                   <a:srgbClr val="D7E3F4"/>
                 </a:solidFill>
@@ -7282,7 +7321,7 @@
               </a:rPr>
               <a:t>    public static final double kElevatorKG = 0.18;</a:t>
             </a:r>
-            <a:endParaRPr lang="en-US" sz="1300" dirty="0"/>
+            <a:endParaRPr lang="en-US" sz="1200" dirty="0"/>
           </a:p>
           <a:p>
             <a:pPr indent="0" marL="0">
@@ -7292,7 +7331,7 @@
               <a:buNone/>
             </a:pPr>
             <a:r>
-              <a:rPr lang="en-US" sz="1300" dirty="0">
+              <a:rPr lang="en-US" sz="1200" dirty="0">
                 <a:solidFill>
                   <a:srgbClr val="FF8B8B"/>
                 </a:solidFill>
@@ -7302,7 +7341,7 @@
               </a:rPr>
               <a:t>=======</a:t>
             </a:r>
-            <a:endParaRPr lang="en-US" sz="1300" dirty="0"/>
+            <a:endParaRPr lang="en-US" sz="1200" dirty="0"/>
           </a:p>
           <a:p>
             <a:pPr indent="0" marL="0">
@@ -7312,7 +7351,7 @@
               <a:buNone/>
             </a:pPr>
             <a:r>
-              <a:rPr lang="en-US" sz="1300" dirty="0">
+              <a:rPr lang="en-US" sz="1200" dirty="0">
                 <a:solidFill>
                   <a:srgbClr val="D7E3F4"/>
                 </a:solidFill>
@@ -7322,7 +7361,7 @@
               </a:rPr>
               <a:t>  public static class ArmConstants {</a:t>
             </a:r>
-            <a:endParaRPr lang="en-US" sz="1300" dirty="0"/>
+            <a:endParaRPr lang="en-US" sz="1200" dirty="0"/>
           </a:p>
           <a:p>
             <a:pPr indent="0" marL="0">
@@ -7332,7 +7371,7 @@
               <a:buNone/>
             </a:pPr>
             <a:r>
-              <a:rPr lang="en-US" sz="1300" dirty="0">
+              <a:rPr lang="en-US" sz="1200" dirty="0">
                 <a:solidFill>
                   <a:srgbClr val="D7E3F4"/>
                 </a:solidFill>
@@ -7342,7 +7381,7 @@
               </a:rPr>
               <a:t>    public static final double kArmKG = 0.25;</a:t>
             </a:r>
-            <a:endParaRPr lang="en-US" sz="1300" dirty="0"/>
+            <a:endParaRPr lang="en-US" sz="1200" dirty="0"/>
           </a:p>
           <a:p>
             <a:pPr indent="0" marL="0">
@@ -7352,7 +7391,7 @@
               <a:buNone/>
             </a:pPr>
             <a:r>
-              <a:rPr lang="en-US" sz="1300" dirty="0">
+              <a:rPr lang="en-US" sz="1200" dirty="0">
                 <a:solidFill>
                   <a:srgbClr val="FF8B8B"/>
                 </a:solidFill>
@@ -7362,7 +7401,7 @@
               </a:rPr>
               <a:t>&gt;&gt;&gt;&gt;&gt;&gt;&gt; lesson-20</a:t>
             </a:r>
-            <a:endParaRPr lang="en-US" sz="1300" dirty="0"/>
+            <a:endParaRPr lang="en-US" sz="1200" dirty="0"/>
           </a:p>
           <a:p>
             <a:pPr indent="0" marL="0">
@@ -7372,7 +7411,7 @@
               <a:buNone/>
             </a:pPr>
             <a:r>
-              <a:rPr lang="en-US" sz="1300" dirty="0">
+              <a:rPr lang="en-US" sz="1200" dirty="0">
                 <a:solidFill>
                   <a:srgbClr val="D7E3F4"/>
                 </a:solidFill>
@@ -7382,7 +7421,7 @@
               </a:rPr>
               <a:t>  }</a:t>
             </a:r>
-            <a:endParaRPr lang="en-US" sz="1300" dirty="0"/>
+            <a:endParaRPr lang="en-US" sz="1200" dirty="0"/>
           </a:p>
           <a:p>
             <a:pPr indent="0" marL="0">
@@ -7392,7 +7431,7 @@
               <a:buNone/>
             </a:pPr>
             <a:r>
-              <a:rPr lang="en-US" sz="1300" dirty="0">
+              <a:rPr lang="en-US" sz="1200" dirty="0">
                 <a:solidFill>
                   <a:srgbClr val="D7E3F4"/>
                 </a:solidFill>
@@ -7402,24 +7441,24 @@
               </a:rPr>
               <a:t>}</a:t>
             </a:r>
-            <a:endParaRPr lang="en-US" sz="1300" dirty="0"/>
-          </a:p>
-        </p:txBody>
-      </p:sp>
-      <p:sp>
-        <p:nvSpPr>
-          <p:cNvPr id="11" name="Shape 8"/>
-          <p:cNvSpPr/>
-          <p:nvPr/>
-        </p:nvSpPr>
-        <p:spPr>
-          <a:xfrm>
-            <a:off x="640080" y="4526280"/>
-            <a:ext cx="10881360" cy="1874520"/>
+            <a:endParaRPr lang="en-US" sz="1200" dirty="0"/>
+          </a:p>
+        </p:txBody>
+      </p:sp>
+      <p:sp>
+        <p:nvSpPr>
+          <p:cNvPr id="12" name="Shape 9"/>
+          <p:cNvSpPr/>
+          <p:nvPr/>
+        </p:nvSpPr>
+        <p:spPr>
+          <a:xfrm>
+            <a:off x="640080" y="4800600"/>
+            <a:ext cx="10881360" cy="1600200"/>
           </a:xfrm>
           <a:prstGeom prst="roundRect">
             <a:avLst>
-              <a:gd name="adj" fmla="val 4878"/>
+              <a:gd name="adj" fmla="val 5714"/>
             </a:avLst>
           </a:prstGeom>
           <a:solidFill>
@@ -7430,14 +7469,14 @@
       </p:sp>
       <p:sp>
         <p:nvSpPr>
-          <p:cNvPr id="12" name="Text 9"/>
-          <p:cNvSpPr/>
-          <p:nvPr/>
-        </p:nvSpPr>
-        <p:spPr>
-          <a:xfrm>
-            <a:off x="868680" y="4754880"/>
-            <a:ext cx="10424160" cy="1417320"/>
+          <p:cNvPr id="13" name="Text 10"/>
+          <p:cNvSpPr/>
+          <p:nvPr/>
+        </p:nvSpPr>
+        <p:spPr>
+          <a:xfrm>
+            <a:off x="822960" y="4983480"/>
+            <a:ext cx="10515600" cy="1234440"/>
           </a:xfrm>
           <a:prstGeom prst="rect">
             <a:avLst/>
@@ -7464,7 +7503,7 @@
                 <a:ea typeface="Calibri" pitchFamily="34" charset="-122"/>
                 <a:cs typeface="Calibri" pitchFamily="34" charset="-120"/>
               </a:rPr>
-              <a:t>You want the elevator and the arm — both belong in the robot. Edit until both blocks remain and the markers are gone, then stage and commit. Most conflicts here are two additions landing close together — keep both, don't choose.</a:t>
+              <a:t>You want the elevator and the arm — both belong in the robot. Edit until both blocks remain and the markers are gone. Most conflicts here are two additions landing close together — keep both, don't choose.</a:t>
             </a:r>
             <a:endParaRPr lang="en-US" sz="2000" dirty="0"/>
           </a:p>
@@ -7472,7 +7511,7 @@
       </p:sp>
       <p:sp>
         <p:nvSpPr>
-          <p:cNvPr id="13" name="Text 10"/>
+          <p:cNvPr id="14" name="Text 11"/>
           <p:cNvSpPr/>
           <p:nvPr/>
         </p:nvSpPr>
@@ -7511,7 +7550,7 @@
       </p:sp>
       <p:sp>
         <p:nvSpPr>
-          <p:cNvPr id="14" name="Text 11"/>
+          <p:cNvPr id="15" name="Text 12"/>
           <p:cNvSpPr/>
           <p:nvPr/>
         </p:nvSpPr>
@@ -7550,7 +7589,7 @@
       </p:sp>
       <p:pic>
         <p:nvPicPr>
-          <p:cNvPr id="15" name="Image 1" descr="/home/user/BasicRobotLessons/docs/presentations/v3/template/assets/logo/team5010-logo-onwhite.png">    </p:cNvPr>
+          <p:cNvPr id="16" name="Image 1" descr="/home/user/BasicRobotLessons/docs/presentations/v3/template/assets/logo/team5010-logo-onwhite.png">    </p:cNvPr>
           <p:cNvPicPr>
             <a:picLocks noChangeAspect="1"/>
           </p:cNvPicPr>
